--- a/data-eng/decks/w4d3s2.pptx
+++ b/data-eng/decks/w4d3s2.pptx
@@ -3100,7 +3100,7 @@
       <p:grpSpPr/>
       <p:sp>
         <p:nvSpPr>
-          <p:cNvPr id="2" name="Oval 1"/>
+          <p:cNvPr id="2" name="deckgen:decor"/>
           <p:cNvSpPr/>
           <p:nvPr/>
         </p:nvSpPr>
@@ -3130,7 +3130,7 @@
       </p:sp>
       <p:sp>
         <p:nvSpPr>
-          <p:cNvPr id="3" name="Oval 2"/>
+          <p:cNvPr id="3" name="deckgen:decor"/>
           <p:cNvSpPr/>
           <p:nvPr/>
         </p:nvSpPr>
@@ -3160,7 +3160,7 @@
       </p:sp>
       <p:sp>
         <p:nvSpPr>
-          <p:cNvPr id="4" name="Oval 3"/>
+          <p:cNvPr id="4" name="deckgen:decor"/>
           <p:cNvSpPr/>
           <p:nvPr/>
         </p:nvSpPr>
@@ -3190,7 +3190,7 @@
       </p:sp>
       <p:sp>
         <p:nvSpPr>
-          <p:cNvPr id="5" name="Rectangle 4"/>
+          <p:cNvPr id="5" name="deckgen:decor"/>
           <p:cNvSpPr/>
           <p:nvPr/>
         </p:nvSpPr>
@@ -3220,7 +3220,7 @@
       </p:sp>
       <p:sp>
         <p:nvSpPr>
-          <p:cNvPr id="6" name="Oval 5"/>
+          <p:cNvPr id="6" name="deckgen:decor"/>
           <p:cNvSpPr/>
           <p:nvPr/>
         </p:nvSpPr>
@@ -3250,7 +3250,7 @@
       </p:sp>
       <p:sp>
         <p:nvSpPr>
-          <p:cNvPr id="7" name="Oval 6"/>
+          <p:cNvPr id="7" name="deckgen:decor"/>
           <p:cNvSpPr/>
           <p:nvPr/>
         </p:nvSpPr>
@@ -3280,7 +3280,7 @@
       </p:sp>
       <p:sp>
         <p:nvSpPr>
-          <p:cNvPr id="8" name="Oval 7"/>
+          <p:cNvPr id="8" name="deckgen:decor"/>
           <p:cNvSpPr/>
           <p:nvPr/>
         </p:nvSpPr>
@@ -3310,7 +3310,7 @@
       </p:sp>
       <p:sp>
         <p:nvSpPr>
-          <p:cNvPr id="9" name="Oval 8"/>
+          <p:cNvPr id="9" name="deckgen:decor"/>
           <p:cNvSpPr/>
           <p:nvPr/>
         </p:nvSpPr>
@@ -3340,7 +3340,7 @@
       </p:sp>
       <p:sp>
         <p:nvSpPr>
-          <p:cNvPr id="10" name="Rectangle 9"/>
+          <p:cNvPr id="10" name="deckgen:decor"/>
           <p:cNvSpPr/>
           <p:nvPr/>
         </p:nvSpPr>
@@ -3600,7 +3600,7 @@
       <p:grpSpPr/>
       <p:sp>
         <p:nvSpPr>
-          <p:cNvPr id="2" name="Oval 1"/>
+          <p:cNvPr id="2" name="deckgen:decor"/>
           <p:cNvSpPr/>
           <p:nvPr/>
         </p:nvSpPr>
@@ -3630,7 +3630,7 @@
       </p:sp>
       <p:sp>
         <p:nvSpPr>
-          <p:cNvPr id="3" name="Oval 2"/>
+          <p:cNvPr id="3" name="deckgen:decor"/>
           <p:cNvSpPr/>
           <p:nvPr/>
         </p:nvSpPr>
@@ -3660,7 +3660,7 @@
       </p:sp>
       <p:sp>
         <p:nvSpPr>
-          <p:cNvPr id="4" name="Oval 3"/>
+          <p:cNvPr id="4" name="deckgen:decor"/>
           <p:cNvSpPr/>
           <p:nvPr/>
         </p:nvSpPr>
@@ -4233,7 +4233,7 @@
                 <a:ea typeface="Pretendard"/>
                 <a:cs typeface="Pretendard"/>
               </a:rPr>
-              <a:t>spark-shell 에서 raw.count() 가 5 다</a:t>
+              <a:t>spark-shell 에서 raw.count() 가 res1: Long = 5 다</a:t>
             </a:r>
           </a:p>
         </p:txBody>
@@ -4379,7 +4379,7 @@
                 <a:ea typeface="Pretendard"/>
                 <a:cs typeface="Pretendard"/>
               </a:rPr>
-              <a:t>path.style.access 를 빼면 왜 실패하는지 말할 수 있다</a:t>
+              <a:t>--packages 를 빼면 왜 실패하는지 말할 수 있다</a:t>
             </a:r>
           </a:p>
         </p:txBody>
@@ -4525,7 +4525,7 @@
                 <a:ea typeface="Pretendard"/>
                 <a:cs typeface="Pretendard"/>
               </a:rPr>
-              <a:t>order_id 2 가 2건이고 amount 가 32000 · 35000 으로 다르다</a:t>
+              <a:t>order_id 2 가 2건이고 amount 가 35000 · 32000 으로 다르다</a:t>
             </a:r>
           </a:p>
         </p:txBody>
@@ -4662,7 +4662,7 @@
       <p:grpSpPr/>
       <p:sp>
         <p:nvSpPr>
-          <p:cNvPr id="2" name="Oval 1"/>
+          <p:cNvPr id="2" name="deckgen:decor"/>
           <p:cNvSpPr/>
           <p:nvPr/>
         </p:nvSpPr>
@@ -4692,7 +4692,7 @@
       </p:sp>
       <p:sp>
         <p:nvSpPr>
-          <p:cNvPr id="3" name="Oval 2"/>
+          <p:cNvPr id="3" name="deckgen:decor"/>
           <p:cNvSpPr/>
           <p:nvPr/>
         </p:nvSpPr>
@@ -5469,7 +5469,7 @@
       <p:grpSpPr/>
       <p:sp>
         <p:nvSpPr>
-          <p:cNvPr id="2" name="Oval 1"/>
+          <p:cNvPr id="2" name="deckgen:decor"/>
           <p:cNvSpPr/>
           <p:nvPr/>
         </p:nvSpPr>
@@ -5499,7 +5499,7 @@
       </p:sp>
       <p:sp>
         <p:nvSpPr>
-          <p:cNvPr id="3" name="Oval 2"/>
+          <p:cNvPr id="3" name="deckgen:decor"/>
           <p:cNvSpPr/>
           <p:nvPr/>
         </p:nvSpPr>
@@ -5529,7 +5529,7 @@
       </p:sp>
       <p:sp>
         <p:nvSpPr>
-          <p:cNvPr id="4" name="Oval 3"/>
+          <p:cNvPr id="4" name="deckgen:decor"/>
           <p:cNvSpPr/>
           <p:nvPr/>
         </p:nvSpPr>
@@ -6102,7 +6102,7 @@
                 <a:ea typeface="Pretendard"/>
                 <a:cs typeface="Pretendard"/>
               </a:rPr>
-              <a:t>s3a --conf 네 개로 spark-shell 에서 랜딩 존을 읽는다</a:t>
+              <a:t>--packages 하나와 --conf 네 개로 spark-shell 에서 랜딩 존을 읽는다</a:t>
             </a:r>
           </a:p>
         </p:txBody>
@@ -6460,7 +6460,7 @@
       <p:grpSpPr/>
       <p:sp>
         <p:nvSpPr>
-          <p:cNvPr id="2" name="Oval 1"/>
+          <p:cNvPr id="2" name="deckgen:decor"/>
           <p:cNvSpPr/>
           <p:nvPr/>
         </p:nvSpPr>
@@ -6490,7 +6490,7 @@
       </p:sp>
       <p:sp>
         <p:nvSpPr>
-          <p:cNvPr id="3" name="Oval 2"/>
+          <p:cNvPr id="3" name="deckgen:decor"/>
           <p:cNvSpPr/>
           <p:nvPr/>
         </p:nvSpPr>
@@ -6520,7 +6520,7 @@
       </p:sp>
       <p:sp>
         <p:nvSpPr>
-          <p:cNvPr id="4" name="Oval 3"/>
+          <p:cNvPr id="4" name="deckgen:decor"/>
           <p:cNvSpPr/>
           <p:nvPr/>
         </p:nvSpPr>
@@ -7188,7 +7188,7 @@
                 <a:ea typeface="Pretendard"/>
                 <a:cs typeface="Pretendard"/>
               </a:rPr>
-              <a:t>--conf 네 개</a:t>
+              <a:t>--packages · --conf</a:t>
             </a:r>
           </a:p>
         </p:txBody>
@@ -7489,7 +7489,7 @@
       <p:grpSpPr/>
       <p:sp>
         <p:nvSpPr>
-          <p:cNvPr id="2" name="Oval 1"/>
+          <p:cNvPr id="2" name="deckgen:decor"/>
           <p:cNvSpPr/>
           <p:nvPr/>
         </p:nvSpPr>
@@ -7519,7 +7519,7 @@
       </p:sp>
       <p:sp>
         <p:nvSpPr>
-          <p:cNvPr id="3" name="Oval 2"/>
+          <p:cNvPr id="3" name="deckgen:decor"/>
           <p:cNvSpPr/>
           <p:nvPr/>
         </p:nvSpPr>
@@ -7549,7 +7549,7 @@
       </p:sp>
       <p:sp>
         <p:nvSpPr>
-          <p:cNvPr id="4" name="Oval 3"/>
+          <p:cNvPr id="4" name="deckgen:decor"/>
           <p:cNvSpPr/>
           <p:nvPr/>
         </p:nvSpPr>
@@ -8582,7 +8582,7 @@
       <p:grpSpPr/>
       <p:sp>
         <p:nvSpPr>
-          <p:cNvPr id="2" name="Oval 1"/>
+          <p:cNvPr id="2" name="deckgen:decor"/>
           <p:cNvSpPr/>
           <p:nvPr/>
         </p:nvSpPr>
@@ -8612,7 +8612,7 @@
       </p:sp>
       <p:sp>
         <p:nvSpPr>
-          <p:cNvPr id="3" name="Oval 2"/>
+          <p:cNvPr id="3" name="deckgen:decor"/>
           <p:cNvSpPr/>
           <p:nvPr/>
         </p:nvSpPr>
@@ -8642,7 +8642,7 @@
       </p:sp>
       <p:sp>
         <p:nvSpPr>
-          <p:cNvPr id="4" name="Oval 3"/>
+          <p:cNvPr id="4" name="deckgen:decor"/>
           <p:cNvSpPr/>
           <p:nvPr/>
         </p:nvSpPr>
@@ -10476,7 +10476,7 @@
       <p:grpSpPr/>
       <p:sp>
         <p:nvSpPr>
-          <p:cNvPr id="2" name="Oval 1"/>
+          <p:cNvPr id="2" name="deckgen:decor"/>
           <p:cNvSpPr/>
           <p:nvPr/>
         </p:nvSpPr>
@@ -10506,7 +10506,7 @@
       </p:sp>
       <p:sp>
         <p:nvSpPr>
-          <p:cNvPr id="3" name="Oval 2"/>
+          <p:cNvPr id="3" name="deckgen:decor"/>
           <p:cNvSpPr/>
           <p:nvPr/>
         </p:nvSpPr>
@@ -10536,7 +10536,7 @@
       </p:sp>
       <p:sp>
         <p:nvSpPr>
-          <p:cNvPr id="4" name="Oval 3"/>
+          <p:cNvPr id="4" name="deckgen:decor"/>
           <p:cNvSpPr/>
           <p:nvPr/>
         </p:nvSpPr>
@@ -10641,7 +10641,7 @@
                 <a:ea typeface="Pretendard"/>
                 <a:cs typeface="Pretendard"/>
               </a:rPr>
-              <a:t>spark-shell 에 붙이는 --conf 네 개</a:t>
+              <a:t>spark-shell 에 붙이는 --packages 하나와 --conf 네 개</a:t>
             </a:r>
           </a:p>
         </p:txBody>
@@ -10685,7 +10685,7 @@
         <p:spPr>
           <a:xfrm>
             <a:off x="1143000" y="2781300"/>
-            <a:ext cx="4762500" cy="590550"/>
+            <a:ext cx="5082540" cy="590550"/>
           </a:xfrm>
           <a:prstGeom prst="rect">
             <a:avLst/>
@@ -10715,7 +10715,7 @@
         <p:spPr>
           <a:xfrm>
             <a:off x="1143000" y="2781300"/>
-            <a:ext cx="4762500" cy="590550"/>
+            <a:ext cx="5082540" cy="590550"/>
           </a:xfrm>
           <a:prstGeom prst="rect">
             <a:avLst/>
@@ -10742,7 +10742,7 @@
                 <a:ea typeface="Pretendard"/>
                 <a:cs typeface="Pretendard"/>
               </a:rPr>
-              <a:t>spark.hadoop.fs.s3a.*</a:t>
+              <a:t>붙이는 것</a:t>
             </a:r>
           </a:p>
         </p:txBody>
@@ -10755,8 +10755,8 @@
         </p:nvSpPr>
         <p:spPr>
           <a:xfrm>
-            <a:off x="5943600" y="2781300"/>
-            <a:ext cx="4762500" cy="590550"/>
+            <a:off x="6263640" y="2781300"/>
+            <a:ext cx="4442460" cy="590550"/>
           </a:xfrm>
           <a:prstGeom prst="rect">
             <a:avLst/>
@@ -10785,8 +10785,8 @@
         </p:nvSpPr>
         <p:spPr>
           <a:xfrm>
-            <a:off x="5943600" y="2781300"/>
-            <a:ext cx="4762500" cy="590550"/>
+            <a:off x="6263640" y="2781300"/>
+            <a:ext cx="4442460" cy="590550"/>
           </a:xfrm>
           <a:prstGeom prst="rect">
             <a:avLst/>
@@ -10898,7 +10898,7 @@
         <p:spPr>
           <a:xfrm>
             <a:off x="1143000" y="3448050"/>
-            <a:ext cx="4762500" cy="647700"/>
+            <a:ext cx="5082540" cy="647700"/>
           </a:xfrm>
           <a:prstGeom prst="roundRect">
             <a:avLst>
@@ -10932,7 +10932,7 @@
         <p:spPr>
           <a:xfrm>
             <a:off x="1238250" y="3448050"/>
-            <a:ext cx="4572000" cy="647700"/>
+            <a:ext cx="4892040" cy="647700"/>
           </a:xfrm>
           <a:prstGeom prst="rect">
             <a:avLst/>
@@ -10959,7 +10959,7 @@
                 <a:ea typeface="Pretendard"/>
                 <a:cs typeface="Pretendard"/>
               </a:rPr>
-              <a:t>endpoint</a:t>
+              <a:t>--packages</a:t>
             </a:r>
           </a:p>
         </p:txBody>
@@ -10972,8 +10972,8 @@
         </p:nvSpPr>
         <p:spPr>
           <a:xfrm>
-            <a:off x="5943600" y="3448050"/>
-            <a:ext cx="4762500" cy="647700"/>
+            <a:off x="6263640" y="3448050"/>
+            <a:ext cx="4442460" cy="647700"/>
           </a:xfrm>
           <a:prstGeom prst="roundRect">
             <a:avLst>
@@ -11006,8 +11006,8 @@
         </p:nvSpPr>
         <p:spPr>
           <a:xfrm>
-            <a:off x="6038850" y="3448050"/>
-            <a:ext cx="4572000" cy="647700"/>
+            <a:off x="6358890" y="3448050"/>
+            <a:ext cx="4251960" cy="647700"/>
           </a:xfrm>
           <a:prstGeom prst="rect">
             <a:avLst/>
@@ -11034,7 +11034,7 @@
                 <a:ea typeface="Pretendard"/>
                 <a:cs typeface="Pretendard"/>
               </a:rPr>
-              <a:t>http://minio:9000</a:t>
+              <a:t>hadoop-aws:3.3.4</a:t>
             </a:r>
           </a:p>
         </p:txBody>
@@ -11109,7 +11109,7 @@
                 <a:ea typeface="Pretendard"/>
                 <a:cs typeface="Pretendard"/>
               </a:rPr>
-              <a:t>S3 API 주소 — 컨테이너 이름</a:t>
+              <a:t>s3a 부품 — 이미지 하둡과 같은 판</a:t>
             </a:r>
           </a:p>
         </p:txBody>
@@ -11123,7 +11123,7 @@
         <p:spPr>
           <a:xfrm>
             <a:off x="1143000" y="4171950"/>
-            <a:ext cx="4762500" cy="647700"/>
+            <a:ext cx="5082540" cy="647700"/>
           </a:xfrm>
           <a:prstGeom prst="roundRect">
             <a:avLst>
@@ -11157,7 +11157,7 @@
         <p:spPr>
           <a:xfrm>
             <a:off x="1238250" y="4171950"/>
-            <a:ext cx="4572000" cy="647700"/>
+            <a:ext cx="4892040" cy="647700"/>
           </a:xfrm>
           <a:prstGeom prst="rect">
             <a:avLst/>
@@ -11184,7 +11184,7 @@
                 <a:ea typeface="Pretendard"/>
                 <a:cs typeface="Pretendard"/>
               </a:rPr>
-              <a:t>access.key</a:t>
+              <a:t>fs.s3a.endpoint</a:t>
             </a:r>
           </a:p>
         </p:txBody>
@@ -11197,8 +11197,8 @@
         </p:nvSpPr>
         <p:spPr>
           <a:xfrm>
-            <a:off x="5943600" y="4171950"/>
-            <a:ext cx="4762500" cy="647700"/>
+            <a:off x="6263640" y="4171950"/>
+            <a:ext cx="4442460" cy="647700"/>
           </a:xfrm>
           <a:prstGeom prst="roundRect">
             <a:avLst>
@@ -11231,8 +11231,8 @@
         </p:nvSpPr>
         <p:spPr>
           <a:xfrm>
-            <a:off x="6038850" y="4171950"/>
-            <a:ext cx="4572000" cy="647700"/>
+            <a:off x="6358890" y="4171950"/>
+            <a:ext cx="4251960" cy="647700"/>
           </a:xfrm>
           <a:prstGeom prst="rect">
             <a:avLst/>
@@ -11259,7 +11259,7 @@
                 <a:ea typeface="Pretendard"/>
                 <a:cs typeface="Pretendard"/>
               </a:rPr>
-              <a:t>minioadmin</a:t>
+              <a:t>http://minio:9000</a:t>
             </a:r>
           </a:p>
         </p:txBody>
@@ -11334,7 +11334,7 @@
                 <a:ea typeface="Pretendard"/>
                 <a:cs typeface="Pretendard"/>
               </a:rPr>
-              <a:t>접근 키</a:t>
+              <a:t>S3 API 주소 — 컨테이너 이름</a:t>
             </a:r>
           </a:p>
         </p:txBody>
@@ -11348,7 +11348,7 @@
         <p:spPr>
           <a:xfrm>
             <a:off x="1143000" y="4895850"/>
-            <a:ext cx="4762500" cy="647700"/>
+            <a:ext cx="5082540" cy="647700"/>
           </a:xfrm>
           <a:prstGeom prst="roundRect">
             <a:avLst>
@@ -11382,7 +11382,7 @@
         <p:spPr>
           <a:xfrm>
             <a:off x="1238250" y="4895850"/>
-            <a:ext cx="4572000" cy="647700"/>
+            <a:ext cx="4892040" cy="647700"/>
           </a:xfrm>
           <a:prstGeom prst="rect">
             <a:avLst/>
@@ -11409,7 +11409,7 @@
                 <a:ea typeface="Pretendard"/>
                 <a:cs typeface="Pretendard"/>
               </a:rPr>
-              <a:t>secret.key</a:t>
+              <a:t>fs.s3a.access.key</a:t>
             </a:r>
           </a:p>
         </p:txBody>
@@ -11422,8 +11422,8 @@
         </p:nvSpPr>
         <p:spPr>
           <a:xfrm>
-            <a:off x="5943600" y="4895850"/>
-            <a:ext cx="4762500" cy="647700"/>
+            <a:off x="6263640" y="4895850"/>
+            <a:ext cx="4442460" cy="647700"/>
           </a:xfrm>
           <a:prstGeom prst="roundRect">
             <a:avLst>
@@ -11456,8 +11456,8 @@
         </p:nvSpPr>
         <p:spPr>
           <a:xfrm>
-            <a:off x="6038850" y="4895850"/>
-            <a:ext cx="4572000" cy="647700"/>
+            <a:off x="6358890" y="4895850"/>
+            <a:ext cx="4251960" cy="647700"/>
           </a:xfrm>
           <a:prstGeom prst="rect">
             <a:avLst/>
@@ -11559,7 +11559,7 @@
                 <a:ea typeface="Pretendard"/>
                 <a:cs typeface="Pretendard"/>
               </a:rPr>
-              <a:t>비밀 키</a:t>
+              <a:t>접근 키</a:t>
             </a:r>
           </a:p>
         </p:txBody>
@@ -11573,7 +11573,7 @@
         <p:spPr>
           <a:xfrm>
             <a:off x="1143000" y="5619750"/>
-            <a:ext cx="4762500" cy="647700"/>
+            <a:ext cx="5082540" cy="647700"/>
           </a:xfrm>
           <a:prstGeom prst="roundRect">
             <a:avLst>
@@ -11607,7 +11607,7 @@
         <p:spPr>
           <a:xfrm>
             <a:off x="1238250" y="5619750"/>
-            <a:ext cx="4572000" cy="647700"/>
+            <a:ext cx="4892040" cy="647700"/>
           </a:xfrm>
           <a:prstGeom prst="rect">
             <a:avLst/>
@@ -11634,7 +11634,7 @@
                 <a:ea typeface="Pretendard"/>
                 <a:cs typeface="Pretendard"/>
               </a:rPr>
-              <a:t>path.style.access</a:t>
+              <a:t>fs.s3a.secret.key</a:t>
             </a:r>
           </a:p>
         </p:txBody>
@@ -11647,8 +11647,8 @@
         </p:nvSpPr>
         <p:spPr>
           <a:xfrm>
-            <a:off x="5943600" y="5619750"/>
-            <a:ext cx="4762500" cy="647700"/>
+            <a:off x="6263640" y="5619750"/>
+            <a:ext cx="4442460" cy="647700"/>
           </a:xfrm>
           <a:prstGeom prst="roundRect">
             <a:avLst>
@@ -11681,8 +11681,8 @@
         </p:nvSpPr>
         <p:spPr>
           <a:xfrm>
-            <a:off x="6038850" y="5619750"/>
-            <a:ext cx="4572000" cy="647700"/>
+            <a:off x="6358890" y="5619750"/>
+            <a:ext cx="4251960" cy="647700"/>
           </a:xfrm>
           <a:prstGeom prst="rect">
             <a:avLst/>
@@ -11709,7 +11709,7 @@
                 <a:ea typeface="Pretendard"/>
                 <a:cs typeface="Pretendard"/>
               </a:rPr>
-              <a:t>true</a:t>
+              <a:t>minioadmin</a:t>
             </a:r>
           </a:p>
         </p:txBody>
@@ -11784,6 +11784,231 @@
                 <a:ea typeface="Pretendard"/>
                 <a:cs typeface="Pretendard"/>
               </a:rPr>
+              <a:t>비밀 키</a:t>
+            </a:r>
+          </a:p>
+        </p:txBody>
+      </p:sp>
+      <p:sp>
+        <p:nvSpPr>
+          <p:cNvPr id="38" name="Rounded Rectangle 37"/>
+          <p:cNvSpPr/>
+          <p:nvPr/>
+        </p:nvSpPr>
+        <p:spPr>
+          <a:xfrm>
+            <a:off x="1143000" y="6343650"/>
+            <a:ext cx="5082540" cy="647700"/>
+          </a:xfrm>
+          <a:prstGeom prst="roundRect">
+            <a:avLst>
+              <a:gd name="adj" fmla="val 5882"/>
+            </a:avLst>
+          </a:prstGeom>
+          <a:solidFill>
+            <a:srgbClr val="EDF3FD"/>
+          </a:solidFill>
+          <a:ln w="9525">
+            <a:solidFill>
+              <a:srgbClr val="BFD3F5"/>
+            </a:solidFill>
+          </a:ln>
+          <a:effectLst/>
+        </p:spPr>
+        <p:txBody>
+          <a:bodyPr rtlCol="0" anchor="ctr" wrap="square"/>
+          <a:lstStyle/>
+          <a:p>
+            <a:pPr algn="ctr"/>
+          </a:p>
+        </p:txBody>
+      </p:sp>
+      <p:sp>
+        <p:nvSpPr>
+          <p:cNvPr id="39" name="TextBox 38"/>
+          <p:cNvSpPr txBox="1"/>
+          <p:nvPr/>
+        </p:nvSpPr>
+        <p:spPr>
+          <a:xfrm>
+            <a:off x="1238250" y="6343650"/>
+            <a:ext cx="4892040" cy="647700"/>
+          </a:xfrm>
+          <a:prstGeom prst="rect">
+            <a:avLst/>
+          </a:prstGeom>
+          <a:noFill/>
+        </p:spPr>
+        <p:txBody>
+          <a:bodyPr wrap="square" lIns="0" rIns="0" tIns="0" bIns="0" anchor="ctr">
+            <a:spAutoFit/>
+          </a:bodyPr>
+          <a:lstStyle/>
+          <a:p>
+            <a:pPr algn="l">
+              <a:lnSpc>
+                <a:spcPct val="115000"/>
+              </a:lnSpc>
+            </a:pPr>
+            <a:r>
+              <a:rPr sz="1875" b="1">
+                <a:solidFill>
+                  <a:srgbClr val="0D2B5E"/>
+                </a:solidFill>
+                <a:latin typeface="Pretendard"/>
+                <a:ea typeface="Pretendard"/>
+                <a:cs typeface="Pretendard"/>
+              </a:rPr>
+              <a:t>fs.s3a.path.style.access</a:t>
+            </a:r>
+          </a:p>
+        </p:txBody>
+      </p:sp>
+      <p:sp>
+        <p:nvSpPr>
+          <p:cNvPr id="40" name="Rounded Rectangle 39"/>
+          <p:cNvSpPr/>
+          <p:nvPr/>
+        </p:nvSpPr>
+        <p:spPr>
+          <a:xfrm>
+            <a:off x="6263640" y="6343650"/>
+            <a:ext cx="4442460" cy="647700"/>
+          </a:xfrm>
+          <a:prstGeom prst="roundRect">
+            <a:avLst>
+              <a:gd name="adj" fmla="val 5882"/>
+            </a:avLst>
+          </a:prstGeom>
+          <a:solidFill>
+            <a:srgbClr val="FAFBFD"/>
+          </a:solidFill>
+          <a:ln w="9525">
+            <a:solidFill>
+              <a:srgbClr val="DCE1E8"/>
+            </a:solidFill>
+          </a:ln>
+          <a:effectLst/>
+        </p:spPr>
+        <p:txBody>
+          <a:bodyPr rtlCol="0" anchor="ctr" wrap="square"/>
+          <a:lstStyle/>
+          <a:p>
+            <a:pPr algn="ctr"/>
+          </a:p>
+        </p:txBody>
+      </p:sp>
+      <p:sp>
+        <p:nvSpPr>
+          <p:cNvPr id="41" name="TextBox 40"/>
+          <p:cNvSpPr txBox="1"/>
+          <p:nvPr/>
+        </p:nvSpPr>
+        <p:spPr>
+          <a:xfrm>
+            <a:off x="6358890" y="6343650"/>
+            <a:ext cx="4251960" cy="647700"/>
+          </a:xfrm>
+          <a:prstGeom prst="rect">
+            <a:avLst/>
+          </a:prstGeom>
+          <a:noFill/>
+        </p:spPr>
+        <p:txBody>
+          <a:bodyPr wrap="square" lIns="0" rIns="0" tIns="0" bIns="0" anchor="ctr">
+            <a:spAutoFit/>
+          </a:bodyPr>
+          <a:lstStyle/>
+          <a:p>
+            <a:pPr algn="ctr">
+              <a:lnSpc>
+                <a:spcPct val="115000"/>
+              </a:lnSpc>
+            </a:pPr>
+            <a:r>
+              <a:rPr sz="1875" b="0">
+                <a:solidFill>
+                  <a:srgbClr val="3D3D3D"/>
+                </a:solidFill>
+                <a:latin typeface="Pretendard"/>
+                <a:ea typeface="Pretendard"/>
+                <a:cs typeface="Pretendard"/>
+              </a:rPr>
+              <a:t>true</a:t>
+            </a:r>
+          </a:p>
+        </p:txBody>
+      </p:sp>
+      <p:sp>
+        <p:nvSpPr>
+          <p:cNvPr id="42" name="Rounded Rectangle 41"/>
+          <p:cNvSpPr/>
+          <p:nvPr/>
+        </p:nvSpPr>
+        <p:spPr>
+          <a:xfrm>
+            <a:off x="10744200" y="6343650"/>
+            <a:ext cx="6400800" cy="647700"/>
+          </a:xfrm>
+          <a:prstGeom prst="roundRect">
+            <a:avLst>
+              <a:gd name="adj" fmla="val 5882"/>
+            </a:avLst>
+          </a:prstGeom>
+          <a:solidFill>
+            <a:srgbClr val="FAFBFD"/>
+          </a:solidFill>
+          <a:ln w="9525">
+            <a:solidFill>
+              <a:srgbClr val="DCE1E8"/>
+            </a:solidFill>
+          </a:ln>
+          <a:effectLst/>
+        </p:spPr>
+        <p:txBody>
+          <a:bodyPr rtlCol="0" anchor="ctr" wrap="square"/>
+          <a:lstStyle/>
+          <a:p>
+            <a:pPr algn="ctr"/>
+          </a:p>
+        </p:txBody>
+      </p:sp>
+      <p:sp>
+        <p:nvSpPr>
+          <p:cNvPr id="43" name="TextBox 42"/>
+          <p:cNvSpPr txBox="1"/>
+          <p:nvPr/>
+        </p:nvSpPr>
+        <p:spPr>
+          <a:xfrm>
+            <a:off x="10839450" y="6343650"/>
+            <a:ext cx="6210300" cy="647700"/>
+          </a:xfrm>
+          <a:prstGeom prst="rect">
+            <a:avLst/>
+          </a:prstGeom>
+          <a:noFill/>
+        </p:spPr>
+        <p:txBody>
+          <a:bodyPr wrap="square" lIns="0" rIns="0" tIns="0" bIns="0" anchor="ctr">
+            <a:spAutoFit/>
+          </a:bodyPr>
+          <a:lstStyle/>
+          <a:p>
+            <a:pPr algn="ctr">
+              <a:lnSpc>
+                <a:spcPct val="115000"/>
+              </a:lnSpc>
+            </a:pPr>
+            <a:r>
+              <a:rPr sz="1875" b="0">
+                <a:solidFill>
+                  <a:srgbClr val="3D3D3D"/>
+                </a:solidFill>
+                <a:latin typeface="Pretendard"/>
+                <a:ea typeface="Pretendard"/>
+                <a:cs typeface="Pretendard"/>
+              </a:rPr>
               <a:t>MinIO 형식(주소/버킷)으로</a:t>
             </a:r>
           </a:p>
@@ -11791,7 +12016,7 @@
       </p:sp>
       <p:sp>
         <p:nvSpPr>
-          <p:cNvPr id="38" name="TextBox 37"/>
+          <p:cNvPr id="44" name="TextBox 43"/>
           <p:cNvSpPr txBox="1"/>
           <p:nvPr/>
         </p:nvSpPr>
@@ -11825,14 +12050,14 @@
                 <a:ea typeface="Pretendard"/>
                 <a:cs typeface="Pretendard"/>
               </a:rPr>
-              <a:t>카탈로그 설정은 이미 되어 있어도 s3a 설정은 따로 — 이론에서 본 「두 갈래 경로」</a:t>
-            </a:r>
-          </a:p>
-        </p:txBody>
-      </p:sp>
-      <p:sp>
-        <p:nvSpPr>
-          <p:cNvPr id="39" name="Rectangle 38"/>
+              <a:t>s3a 부품(hadoop-aws)은 이미지에 없어 받아 온다 — 첫 실행 275MB, 「실습점검」 2단계를 했다면 바로</a:t>
+            </a:r>
+          </a:p>
+        </p:txBody>
+      </p:sp>
+      <p:sp>
+        <p:nvSpPr>
+          <p:cNvPr id="45" name="Rectangle 44"/>
           <p:cNvSpPr/>
           <p:nvPr/>
         </p:nvSpPr>
@@ -11862,7 +12087,7 @@
       </p:sp>
       <p:sp>
         <p:nvSpPr>
-          <p:cNvPr id="40" name="TextBox 39"/>
+          <p:cNvPr id="46" name="TextBox 45"/>
           <p:cNvSpPr txBox="1"/>
           <p:nvPr/>
         </p:nvSpPr>
@@ -11903,7 +12128,7 @@
       </p:sp>
       <p:sp>
         <p:nvSpPr>
-          <p:cNvPr id="41" name="TextBox 40"/>
+          <p:cNvPr id="47" name="TextBox 46"/>
           <p:cNvSpPr txBox="1"/>
           <p:nvPr/>
         </p:nvSpPr>
@@ -11962,7 +12187,7 @@
       <p:grpSpPr/>
       <p:sp>
         <p:nvSpPr>
-          <p:cNvPr id="2" name="Oval 1"/>
+          <p:cNvPr id="2" name="deckgen:decor"/>
           <p:cNvSpPr/>
           <p:nvPr/>
         </p:nvSpPr>
@@ -11992,7 +12217,7 @@
       </p:sp>
       <p:sp>
         <p:nvSpPr>
-          <p:cNvPr id="3" name="Oval 2"/>
+          <p:cNvPr id="3" name="deckgen:decor"/>
           <p:cNvSpPr/>
           <p:nvPr/>
         </p:nvSpPr>
@@ -12022,7 +12247,7 @@
       </p:sp>
       <p:sp>
         <p:nvSpPr>
-          <p:cNvPr id="4" name="Oval 3"/>
+          <p:cNvPr id="4" name="deckgen:decor"/>
           <p:cNvSpPr/>
           <p:nvPr/>
         </p:nvSpPr>
@@ -12127,7 +12352,7 @@
                 <a:ea typeface="Pretendard"/>
                 <a:cs typeface="Pretendard"/>
               </a:rPr>
-              <a:t>spark-shell 프롬프트에서 — 읽기가 되는지</a:t>
+              <a:t>scala&gt; 프롬프트에서 — 읽기가 되는지</a:t>
             </a:r>
           </a:p>
         </p:txBody>
@@ -12531,7 +12756,7 @@
                 <a:ea typeface="Pretendard"/>
                 <a:cs typeface="Pretendard"/>
               </a:rPr>
-              <a:t>5행(8-01 의 2행 + 8-02 의 3행)이 나오면 s3a 읽기 성공</a:t>
+              <a:t>5행(8-02 의 2·3·4 + 8-01 의 1·2, 순서는 섞일 수 있음) · res1: Long = 5</a:t>
             </a:r>
           </a:p>
         </p:txBody>
@@ -12793,7 +13018,7 @@
                 <a:ea typeface="Pretendard"/>
                 <a:cs typeface="Pretendard"/>
               </a:rPr>
-              <a:t>403 이 나면</a:t>
+              <a:t>멈춘 듯하면</a:t>
             </a:r>
           </a:p>
         </p:txBody>
@@ -12834,7 +13059,7 @@
                 <a:ea typeface="Pretendard"/>
                 <a:cs typeface="Pretendard"/>
               </a:rPr>
-              <a:t>--conf 네 개</a:t>
+              <a:t>첫 실행은</a:t>
             </a:r>
           </a:p>
           <a:p>
@@ -12852,7 +13077,7 @@
                 <a:ea typeface="Pretendard"/>
                 <a:cs typeface="Pretendard"/>
               </a:rPr>
-              <a:t>다시 확인</a:t>
+              <a:t>275MB 받는 중</a:t>
             </a:r>
           </a:p>
         </p:txBody>
@@ -12989,7 +13214,7 @@
       <p:grpSpPr/>
       <p:sp>
         <p:nvSpPr>
-          <p:cNvPr id="2" name="Oval 1"/>
+          <p:cNvPr id="2" name="deckgen:decor"/>
           <p:cNvSpPr/>
           <p:nvPr/>
         </p:nvSpPr>
@@ -13019,7 +13244,7 @@
       </p:sp>
       <p:sp>
         <p:nvSpPr>
-          <p:cNvPr id="3" name="Oval 2"/>
+          <p:cNvPr id="3" name="deckgen:decor"/>
           <p:cNvSpPr/>
           <p:nvPr/>
         </p:nvSpPr>
@@ -13049,7 +13274,7 @@
       </p:sp>
       <p:sp>
         <p:nvSpPr>
-          <p:cNvPr id="4" name="Oval 3"/>
+          <p:cNvPr id="4" name="deckgen:decor"/>
           <p:cNvSpPr/>
           <p:nvPr/>
         </p:nvSpPr>
@@ -13154,7 +13379,7 @@
                 <a:ea typeface="Pretendard"/>
                 <a:cs typeface="Pretendard"/>
               </a:rPr>
-              <a:t>path.style.access 를 빼고 붙여 본다</a:t>
+              <a:t>--packages 줄을 빼고 붙여 본다</a:t>
             </a:r>
           </a:p>
         </p:txBody>
@@ -13266,7 +13491,7 @@
                 <a:ea typeface="Pretendard"/>
                 <a:cs typeface="Pretendard"/>
               </a:rPr>
-              <a:t>AWS 방식(버킷.주소)으로 붙으려다 실패</a:t>
+              <a:t>s3a 부품이 없는 이미지 그대로 읽으려다 실패</a:t>
             </a:r>
           </a:p>
         </p:txBody>
@@ -13371,7 +13596,7 @@
                 <a:ea typeface="Pretendard"/>
                 <a:cs typeface="Pretendard"/>
               </a:rPr>
-              <a:t>403 또는 UnknownHost 오류</a:t>
+              <a:t>ClassNotFoundException 오류</a:t>
             </a:r>
           </a:p>
         </p:txBody>
@@ -13442,7 +13667,7 @@
                 <a:ea typeface="Pretendard"/>
                 <a:cs typeface="Pretendard"/>
               </a:rPr>
-              <a:t>가장 흔한 원인 — 오류 문구를 알아 둔다</a:t>
+              <a:t>끝에 fs.s3a.S3AFileSystem — 부품이 없다는 뜻</a:t>
             </a:r>
           </a:p>
         </p:txBody>
@@ -13513,7 +13738,7 @@
                 <a:ea typeface="Pretendard"/>
                 <a:cs typeface="Pretendard"/>
               </a:rPr>
-              <a:t>카탈로그 쓰기는 되는데 읽기만 죽는 이유</a:t>
+              <a:t>이 이미지에는 hadoop-aws 가 들어 있지 않다</a:t>
             </a:r>
           </a:p>
         </p:txBody>
@@ -13554,7 +13779,7 @@
                 <a:ea typeface="Pretendard"/>
                 <a:cs typeface="Pretendard"/>
               </a:rPr>
-              <a:t>true — 성공</a:t>
+              <a:t>넣으면 — 성공</a:t>
             </a:r>
           </a:p>
         </p:txBody>
@@ -13595,7 +13820,7 @@
                 <a:ea typeface="Pretendard"/>
                 <a:cs typeface="Pretendard"/>
               </a:rPr>
-              <a:t>MinIO 형식(주소/버킷)으로 붙는다</a:t>
+              <a:t>hadoop-aws:3.3.4 를 받아 s3a:// 를 읽는다</a:t>
             </a:r>
           </a:p>
         </p:txBody>
@@ -13700,7 +13925,7 @@
                 <a:ea typeface="Pretendard"/>
                 <a:cs typeface="Pretendard"/>
               </a:rPr>
-              <a:t>MinIO 는 기본이 path style</a:t>
+              <a:t>모든 spark-shell·spark-submit 에 같은 줄</a:t>
             </a:r>
           </a:p>
         </p:txBody>
@@ -13771,7 +13996,7 @@
                 <a:ea typeface="Pretendard"/>
                 <a:cs typeface="Pretendard"/>
               </a:rPr>
-              <a:t>반드시 true 로 준다</a:t>
+              <a:t>주의: path.style.access 를 빼면 오류 없이 멈춤</a:t>
             </a:r>
           </a:p>
         </p:txBody>
@@ -13842,7 +14067,7 @@
                 <a:ea typeface="Pretendard"/>
                 <a:cs typeface="Pretendard"/>
               </a:rPr>
-              <a:t>endpoint 는 https 가 아닌 http://minio:9000</a:t>
+              <a:t>몇 분째 조용하면 Ctrl+C 로 끊고 확인</a:t>
             </a:r>
           </a:p>
         </p:txBody>
@@ -14050,7 +14275,7 @@
       <p:grpSpPr/>
       <p:sp>
         <p:nvSpPr>
-          <p:cNvPr id="2" name="Oval 1"/>
+          <p:cNvPr id="2" name="deckgen:decor"/>
           <p:cNvSpPr/>
           <p:nvPr/>
         </p:nvSpPr>
@@ -14080,7 +14305,7 @@
       </p:sp>
       <p:sp>
         <p:nvSpPr>
-          <p:cNvPr id="3" name="Oval 2"/>
+          <p:cNvPr id="3" name="deckgen:decor"/>
           <p:cNvSpPr/>
           <p:nvPr/>
         </p:nvSpPr>
@@ -14110,7 +14335,7 @@
       </p:sp>
       <p:sp>
         <p:nvSpPr>
-          <p:cNvPr id="4" name="Oval 3"/>
+          <p:cNvPr id="4" name="deckgen:decor"/>
           <p:cNvSpPr/>
           <p:nvPr/>
         </p:nvSpPr>
